--- a/dist/초1/수학/수와연산/초1_수학_수와연산_11_받아내림이있는뺄셈_학생용.pptx
+++ b/dist/초1/수학/수와연산/초1_수학_수와연산_11_받아내림이있는뺄셈_학생용.pptx
@@ -118,38 +118,38 @@
   <p:extLst>
     <p:ext uri="{521415D9-36F7-43E2-AB2F-B90AF26B5E84}">
       <p14:sectionLst xmlns:p14="http://schemas.microsoft.com/office/powerpoint/2010/main">
-        <p14:section name="도입" id="{ce415fcd-6a82-0e40-1fea-cc0c2bec59df}">
+        <p14:section name="도입" id="{9f7c4d87-30ac-048b-f6b6-79b2705b9a08}">
           <p14:sldIdLst>
             <p14:sldId id="256"/>
             <p14:sldId id="257"/>
           </p14:sldIdLst>
         </p14:section>
-        <p14:section name="개념" id="{e4934e36-8f46-283f-47d3-f4da1c86f48a}">
+        <p14:section name="개념" id="{f02da0e9-c62c-8b8d-8180-1436c2b1f699}">
           <p14:sldIdLst>
             <p14:sldId id="258"/>
             <p14:sldId id="259"/>
             <p14:sldId id="260"/>
           </p14:sldIdLst>
         </p14:section>
-        <p14:section name="연습" id="{80a11913-7ce0-5617-42b7-f03cafaaca2c}">
+        <p14:section name="연습" id="{d1d2040d-e48e-1b08-0014-39d948c0614e}">
           <p14:sldIdLst>
             <p14:sldId id="261"/>
             <p14:sldId id="262"/>
             <p14:sldId id="263"/>
           </p14:sldIdLst>
         </p14:section>
-        <p14:section name="확인" id="{45f93b3a-a189-e7e4-a0d8-35bb16242b42}">
+        <p14:section name="확인" id="{0113abee-43e0-fc76-b5c2-a9ff10cf94d2}">
           <p14:sldIdLst>
             <p14:sldId id="264"/>
             <p14:sldId id="265"/>
           </p14:sldIdLst>
         </p14:section>
-        <p14:section name="정리" id="{7feedcbb-7861-c4be-fed8-43d8ed10e462}">
+        <p14:section name="정리" id="{10bc5978-f61d-f47d-9ad8-8f2e71c88cb2}">
           <p14:sldIdLst>
             <p14:sldId id="266"/>
           </p14:sldIdLst>
         </p14:section>
-        <p14:section name="보충" id="{fb97e8aa-72de-7713-f4ea-2970c40ad3aa}">
+        <p14:section name="보충" id="{d09552e6-32e6-d855-d833-11878aefd457}">
           <p14:sldIdLst>
             <p14:sldId id="267"/>
           </p14:sldIdLst>

--- a/dist/초1/수학/수와연산/초1_수학_수와연산_11_받아내림이있는뺄셈_학생용.pptx
+++ b/dist/초1/수학/수와연산/초1_수학_수와연산_11_받아내림이있는뺄셈_학생용.pptx
@@ -118,38 +118,38 @@
   <p:extLst>
     <p:ext uri="{521415D9-36F7-43E2-AB2F-B90AF26B5E84}">
       <p14:sectionLst xmlns:p14="http://schemas.microsoft.com/office/powerpoint/2010/main">
-        <p14:section name="도입" id="{9f7c4d87-30ac-048b-f6b6-79b2705b9a08}">
+        <p14:section name="도입" id="{5e539452-fded-f5e2-7c0d-d713dd099cf3}">
           <p14:sldIdLst>
             <p14:sldId id="256"/>
             <p14:sldId id="257"/>
           </p14:sldIdLst>
         </p14:section>
-        <p14:section name="개념" id="{f02da0e9-c62c-8b8d-8180-1436c2b1f699}">
+        <p14:section name="개념" id="{0cf8f1aa-0da4-bebb-eae8-192654f8f31b}">
           <p14:sldIdLst>
             <p14:sldId id="258"/>
             <p14:sldId id="259"/>
             <p14:sldId id="260"/>
           </p14:sldIdLst>
         </p14:section>
-        <p14:section name="연습" id="{d1d2040d-e48e-1b08-0014-39d948c0614e}">
+        <p14:section name="연습" id="{ed0636c9-8721-10a3-8640-d043757a7742}">
           <p14:sldIdLst>
             <p14:sldId id="261"/>
             <p14:sldId id="262"/>
             <p14:sldId id="263"/>
           </p14:sldIdLst>
         </p14:section>
-        <p14:section name="확인" id="{0113abee-43e0-fc76-b5c2-a9ff10cf94d2}">
+        <p14:section name="확인" id="{eb78f639-6e66-1898-3119-503be9d2be0a}">
           <p14:sldIdLst>
             <p14:sldId id="264"/>
             <p14:sldId id="265"/>
           </p14:sldIdLst>
         </p14:section>
-        <p14:section name="정리" id="{10bc5978-f61d-f47d-9ad8-8f2e71c88cb2}">
+        <p14:section name="정리" id="{8af56222-d0b7-caef-cfdd-03c6461ac7b9}">
           <p14:sldIdLst>
             <p14:sldId id="266"/>
           </p14:sldIdLst>
         </p14:section>
-        <p14:section name="보충" id="{d09552e6-32e6-d855-d833-11878aefd457}">
+        <p14:section name="보충" id="{551cf240-a6a5-1fed-6ae1-8aa000d9d381}">
           <p14:sldIdLst>
             <p14:sldId id="267"/>
           </p14:sldIdLst>
@@ -5526,7 +5526,7 @@
         </p:nvSpPr>
         <p:spPr>
           <a:xfrm>
-            <a:off x="548640" y="3465576"/>
+            <a:off x="548640" y="3488436"/>
             <a:ext cx="566928" cy="566928"/>
           </a:xfrm>
           <a:prstGeom prst="roundRect">
@@ -5573,8 +5573,8 @@
         </p:nvSpPr>
         <p:spPr>
           <a:xfrm flipH="1">
-            <a:off x="2593848" y="3627120"/>
-            <a:ext cx="853440" cy="243840"/>
+            <a:off x="3207258" y="3646170"/>
+            <a:ext cx="880110" cy="251460"/>
           </a:xfrm>
           <a:prstGeom prst="line">
             <a:avLst/>
@@ -5596,8 +5596,8 @@
         </p:nvSpPr>
         <p:spPr>
           <a:xfrm>
-            <a:off x="3447288" y="3627120"/>
-            <a:ext cx="853440" cy="243840"/>
+            <a:off x="4087368" y="3646170"/>
+            <a:ext cx="880110" cy="251460"/>
           </a:xfrm>
           <a:prstGeom prst="line">
             <a:avLst/>
@@ -5619,8 +5619,8 @@
         </p:nvSpPr>
         <p:spPr>
           <a:xfrm>
-            <a:off x="3142488" y="3017520"/>
-            <a:ext cx="609600" cy="609600"/>
+            <a:off x="3773043" y="3017520"/>
+            <a:ext cx="628650" cy="628650"/>
           </a:xfrm>
           <a:prstGeom prst="ellipse">
             <a:avLst/>
@@ -5643,7 +5643,7 @@
               <a:buNone/>
             </a:pPr>
             <a:r>
-              <a:rPr lang="ko-KR" altLang="en-US" sz="2400" b="1" dirty="0">
+              <a:rPr lang="ko-KR" altLang="en-US" sz="2500" b="1" dirty="0">
                 <a:solidFill>
                   <a:srgbClr val="1F2937"/>
                 </a:solidFill>
@@ -5653,7 +5653,7 @@
               </a:rPr>
               <a:t>10</a:t>
             </a:r>
-            <a:endParaRPr lang="ko-KR" sz="2400" dirty="0"/>
+            <a:endParaRPr lang="ko-KR" sz="2500" dirty="0"/>
           </a:p>
         </p:txBody>
       </p:sp>
@@ -5665,8 +5665,8 @@
         </p:nvSpPr>
         <p:spPr>
           <a:xfrm>
-            <a:off x="2289048" y="3870960"/>
-            <a:ext cx="609600" cy="609600"/>
+            <a:off x="2892933" y="3897630"/>
+            <a:ext cx="628650" cy="628650"/>
           </a:xfrm>
           <a:prstGeom prst="ellipse">
             <a:avLst/>
@@ -5689,7 +5689,7 @@
               <a:buNone/>
             </a:pPr>
             <a:r>
-              <a:rPr lang="ko-KR" altLang="en-US" sz="2400" b="1" dirty="0">
+              <a:rPr lang="ko-KR" altLang="en-US" sz="2500" b="1" dirty="0">
                 <a:solidFill>
                   <a:srgbClr val="1F2937"/>
                 </a:solidFill>
@@ -5699,7 +5699,7 @@
               </a:rPr>
               <a:t>4</a:t>
             </a:r>
-            <a:endParaRPr lang="ko-KR" sz="2400" dirty="0"/>
+            <a:endParaRPr lang="ko-KR" sz="2500" dirty="0"/>
           </a:p>
         </p:txBody>
       </p:sp>
@@ -5711,8 +5711,8 @@
         </p:nvSpPr>
         <p:spPr>
           <a:xfrm>
-            <a:off x="3995928" y="3870960"/>
-            <a:ext cx="609600" cy="609600"/>
+            <a:off x="4653153" y="3897630"/>
+            <a:ext cx="628650" cy="628650"/>
           </a:xfrm>
           <a:prstGeom prst="ellipse">
             <a:avLst/>
@@ -5734,7 +5734,7 @@
             <a:pPr eaLnBrk="0" algn="ctr" indent="0" marL="0">
               <a:buNone/>
             </a:pPr>
-            <a:endParaRPr lang="ko-KR" sz="2400" dirty="0"/>
+            <a:endParaRPr lang="ko-KR" sz="2500" dirty="0"/>
           </a:p>
         </p:txBody>
       </p:sp>
@@ -5746,7 +5746,7 @@
         </p:nvSpPr>
         <p:spPr>
           <a:xfrm>
-            <a:off x="548640" y="5157216"/>
+            <a:off x="548640" y="5180076"/>
             <a:ext cx="566928" cy="566928"/>
           </a:xfrm>
           <a:prstGeom prst="roundRect">
@@ -5793,8 +5793,8 @@
         </p:nvSpPr>
         <p:spPr>
           <a:xfrm flipH="1">
-            <a:off x="2593848" y="5318760"/>
-            <a:ext cx="853440" cy="243840"/>
+            <a:off x="3207258" y="5337810"/>
+            <a:ext cx="880110" cy="251460"/>
           </a:xfrm>
           <a:prstGeom prst="line">
             <a:avLst/>
@@ -5816,8 +5816,8 @@
         </p:nvSpPr>
         <p:spPr>
           <a:xfrm>
-            <a:off x="3447288" y="5318760"/>
-            <a:ext cx="853440" cy="243840"/>
+            <a:off x="4087368" y="5337810"/>
+            <a:ext cx="880110" cy="251460"/>
           </a:xfrm>
           <a:prstGeom prst="line">
             <a:avLst/>
@@ -5839,8 +5839,8 @@
         </p:nvSpPr>
         <p:spPr>
           <a:xfrm>
-            <a:off x="3142488" y="4709160"/>
-            <a:ext cx="609600" cy="609600"/>
+            <a:off x="3773043" y="4709160"/>
+            <a:ext cx="628650" cy="628650"/>
           </a:xfrm>
           <a:prstGeom prst="ellipse">
             <a:avLst/>
@@ -5863,7 +5863,7 @@
               <a:buNone/>
             </a:pPr>
             <a:r>
-              <a:rPr lang="ko-KR" altLang="en-US" sz="2400" b="1" dirty="0">
+              <a:rPr lang="ko-KR" altLang="en-US" sz="2500" b="1" dirty="0">
                 <a:solidFill>
                   <a:srgbClr val="1F2937"/>
                 </a:solidFill>
@@ -5873,7 +5873,7 @@
               </a:rPr>
               <a:t>12</a:t>
             </a:r>
-            <a:endParaRPr lang="ko-KR" sz="2400" dirty="0"/>
+            <a:endParaRPr lang="ko-KR" sz="2500" dirty="0"/>
           </a:p>
         </p:txBody>
       </p:sp>
@@ -5885,8 +5885,8 @@
         </p:nvSpPr>
         <p:spPr>
           <a:xfrm>
-            <a:off x="2289048" y="5562600"/>
-            <a:ext cx="609600" cy="609600"/>
+            <a:off x="2892933" y="5589270"/>
+            <a:ext cx="628650" cy="628650"/>
           </a:xfrm>
           <a:prstGeom prst="ellipse">
             <a:avLst/>
@@ -5909,7 +5909,7 @@
               <a:buNone/>
             </a:pPr>
             <a:r>
-              <a:rPr lang="ko-KR" altLang="en-US" sz="2400" b="1" dirty="0">
+              <a:rPr lang="ko-KR" altLang="en-US" sz="2500" b="1" dirty="0">
                 <a:solidFill>
                   <a:srgbClr val="1F2937"/>
                 </a:solidFill>
@@ -5919,7 +5919,7 @@
               </a:rPr>
               <a:t>10</a:t>
             </a:r>
-            <a:endParaRPr lang="ko-KR" sz="2400" dirty="0"/>
+            <a:endParaRPr lang="ko-KR" sz="2500" dirty="0"/>
           </a:p>
         </p:txBody>
       </p:sp>
@@ -5931,8 +5931,8 @@
         </p:nvSpPr>
         <p:spPr>
           <a:xfrm>
-            <a:off x="3995928" y="5562600"/>
-            <a:ext cx="609600" cy="609600"/>
+            <a:off x="4653153" y="5589270"/>
+            <a:ext cx="628650" cy="628650"/>
           </a:xfrm>
           <a:prstGeom prst="ellipse">
             <a:avLst/>
@@ -5954,7 +5954,7 @@
             <a:pPr eaLnBrk="0" algn="ctr" indent="0" marL="0">
               <a:buNone/>
             </a:pPr>
-            <a:endParaRPr lang="ko-KR" sz="2400" dirty="0"/>
+            <a:endParaRPr lang="ko-KR" sz="2500" dirty="0"/>
           </a:p>
         </p:txBody>
       </p:sp>

--- a/dist/초1/수학/수와연산/초1_수학_수와연산_11_받아내림이있는뺄셈_학생용.pptx
+++ b/dist/초1/수학/수와연산/초1_수학_수와연산_11_받아내림이있는뺄셈_학생용.pptx
@@ -118,38 +118,38 @@
   <p:extLst>
     <p:ext uri="{521415D9-36F7-43E2-AB2F-B90AF26B5E84}">
       <p14:sectionLst xmlns:p14="http://schemas.microsoft.com/office/powerpoint/2010/main">
-        <p14:section name="도입" id="{5e539452-fded-f5e2-7c0d-d713dd099cf3}">
+        <p14:section name="도입" id="{c265e187-ca89-483f-4a81-c6381c468891}">
           <p14:sldIdLst>
             <p14:sldId id="256"/>
             <p14:sldId id="257"/>
           </p14:sldIdLst>
         </p14:section>
-        <p14:section name="개념" id="{0cf8f1aa-0da4-bebb-eae8-192654f8f31b}">
+        <p14:section name="개념" id="{c5617ef7-4fcd-44b4-4512-bd022fa10815}">
           <p14:sldIdLst>
             <p14:sldId id="258"/>
             <p14:sldId id="259"/>
             <p14:sldId id="260"/>
           </p14:sldIdLst>
         </p14:section>
-        <p14:section name="연습" id="{ed0636c9-8721-10a3-8640-d043757a7742}">
+        <p14:section name="연습" id="{51a6e58b-624a-49a7-8161-3d6224dfeb11}">
           <p14:sldIdLst>
             <p14:sldId id="261"/>
             <p14:sldId id="262"/>
             <p14:sldId id="263"/>
           </p14:sldIdLst>
         </p14:section>
-        <p14:section name="확인" id="{eb78f639-6e66-1898-3119-503be9d2be0a}">
+        <p14:section name="확인" id="{65eeeae3-e14e-b10e-36e3-a4bc74e27707}">
           <p14:sldIdLst>
             <p14:sldId id="264"/>
             <p14:sldId id="265"/>
           </p14:sldIdLst>
         </p14:section>
-        <p14:section name="정리" id="{8af56222-d0b7-caef-cfdd-03c6461ac7b9}">
+        <p14:section name="정리" id="{3473d27c-bf78-68be-13dd-798fad8fe765}">
           <p14:sldIdLst>
             <p14:sldId id="266"/>
           </p14:sldIdLst>
         </p14:section>
-        <p14:section name="보충" id="{551cf240-a6a5-1fed-6ae1-8aa000d9d381}">
+        <p14:section name="보충" id="{19a68296-6c34-eab7-0481-5271e15e6292}">
           <p14:sldIdLst>
             <p14:sldId id="267"/>
           </p14:sldIdLst>
